--- a/十架的冠冕.pptx
+++ b/十架的冠冕.pptx
@@ -167,10 +167,9 @@
           <a:lstStyle/>
           <a:p>
             <a:r>
-              <a:rPr lang="zh-TW" altLang="en-US" smtClean="0"/>
+              <a:rPr lang="zh-TW" altLang="en-US"/>
               <a:t>按一下以編輯母片標題樣式</a:t>
             </a:r>
-            <a:endParaRPr lang="zh-TW" altLang="en-US"/>
           </a:p>
         </p:txBody>
       </p:sp>
@@ -286,10 +285,9 @@
           </a:lstStyle>
           <a:p>
             <a:r>
-              <a:rPr lang="zh-TW" altLang="en-US" smtClean="0"/>
+              <a:rPr lang="zh-TW" altLang="en-US"/>
               <a:t>按一下以編輯母片副標題樣式</a:t>
             </a:r>
-            <a:endParaRPr lang="zh-TW" altLang="en-US"/>
           </a:p>
         </p:txBody>
       </p:sp>
@@ -311,7 +309,7 @@
             <a:fld id="{98A0A244-3D1D-47C8-8F37-0DEF6FAFF73D}" type="datetimeFigureOut">
               <a:rPr lang="zh-TW" altLang="en-US" smtClean="0"/>
               <a:pPr/>
-              <a:t>2023/7/3</a:t>
+              <a:t>2024/5/18</a:t>
             </a:fld>
             <a:endParaRPr lang="zh-TW" altLang="en-US"/>
           </a:p>
@@ -401,10 +399,9 @@
           <a:lstStyle/>
           <a:p>
             <a:r>
-              <a:rPr lang="zh-TW" altLang="en-US" smtClean="0"/>
+              <a:rPr lang="zh-TW" altLang="en-US"/>
               <a:t>按一下以編輯母片標題樣式</a:t>
             </a:r>
-            <a:endParaRPr lang="zh-TW" altLang="en-US"/>
           </a:p>
         </p:txBody>
       </p:sp>
@@ -425,38 +422,37 @@
           <a:p>
             <a:pPr lvl="0"/>
             <a:r>
-              <a:rPr lang="zh-TW" altLang="en-US" smtClean="0"/>
+              <a:rPr lang="zh-TW" altLang="en-US"/>
               <a:t>按一下以編輯母片文字樣式</a:t>
             </a:r>
           </a:p>
           <a:p>
             <a:pPr lvl="1"/>
             <a:r>
-              <a:rPr lang="zh-TW" altLang="en-US" smtClean="0"/>
+              <a:rPr lang="zh-TW" altLang="en-US"/>
               <a:t>第二層</a:t>
             </a:r>
           </a:p>
           <a:p>
             <a:pPr lvl="2"/>
             <a:r>
-              <a:rPr lang="zh-TW" altLang="en-US" smtClean="0"/>
+              <a:rPr lang="zh-TW" altLang="en-US"/>
               <a:t>第三層</a:t>
             </a:r>
           </a:p>
           <a:p>
             <a:pPr lvl="3"/>
             <a:r>
-              <a:rPr lang="zh-TW" altLang="en-US" smtClean="0"/>
+              <a:rPr lang="zh-TW" altLang="en-US"/>
               <a:t>第四層</a:t>
             </a:r>
           </a:p>
           <a:p>
             <a:pPr lvl="4"/>
             <a:r>
-              <a:rPr lang="zh-TW" altLang="en-US" smtClean="0"/>
+              <a:rPr lang="zh-TW" altLang="en-US"/>
               <a:t>第五層</a:t>
             </a:r>
-            <a:endParaRPr lang="zh-TW" altLang="en-US"/>
           </a:p>
         </p:txBody>
       </p:sp>
@@ -478,7 +474,7 @@
             <a:fld id="{98A0A244-3D1D-47C8-8F37-0DEF6FAFF73D}" type="datetimeFigureOut">
               <a:rPr lang="zh-TW" altLang="en-US" smtClean="0"/>
               <a:pPr/>
-              <a:t>2023/7/3</a:t>
+              <a:t>2024/5/18</a:t>
             </a:fld>
             <a:endParaRPr lang="zh-TW" altLang="en-US"/>
           </a:p>
@@ -573,10 +569,9 @@
           <a:lstStyle/>
           <a:p>
             <a:r>
-              <a:rPr lang="zh-TW" altLang="en-US" smtClean="0"/>
+              <a:rPr lang="zh-TW" altLang="en-US"/>
               <a:t>按一下以編輯母片標題樣式</a:t>
             </a:r>
-            <a:endParaRPr lang="zh-TW" altLang="en-US"/>
           </a:p>
         </p:txBody>
       </p:sp>
@@ -602,38 +597,37 @@
           <a:p>
             <a:pPr lvl="0"/>
             <a:r>
-              <a:rPr lang="zh-TW" altLang="en-US" smtClean="0"/>
+              <a:rPr lang="zh-TW" altLang="en-US"/>
               <a:t>按一下以編輯母片文字樣式</a:t>
             </a:r>
           </a:p>
           <a:p>
             <a:pPr lvl="1"/>
             <a:r>
-              <a:rPr lang="zh-TW" altLang="en-US" smtClean="0"/>
+              <a:rPr lang="zh-TW" altLang="en-US"/>
               <a:t>第二層</a:t>
             </a:r>
           </a:p>
           <a:p>
             <a:pPr lvl="2"/>
             <a:r>
-              <a:rPr lang="zh-TW" altLang="en-US" smtClean="0"/>
+              <a:rPr lang="zh-TW" altLang="en-US"/>
               <a:t>第三層</a:t>
             </a:r>
           </a:p>
           <a:p>
             <a:pPr lvl="3"/>
             <a:r>
-              <a:rPr lang="zh-TW" altLang="en-US" smtClean="0"/>
+              <a:rPr lang="zh-TW" altLang="en-US"/>
               <a:t>第四層</a:t>
             </a:r>
           </a:p>
           <a:p>
             <a:pPr lvl="4"/>
             <a:r>
-              <a:rPr lang="zh-TW" altLang="en-US" smtClean="0"/>
+              <a:rPr lang="zh-TW" altLang="en-US"/>
               <a:t>第五層</a:t>
             </a:r>
-            <a:endParaRPr lang="zh-TW" altLang="en-US"/>
           </a:p>
         </p:txBody>
       </p:sp>
@@ -655,7 +649,7 @@
             <a:fld id="{98A0A244-3D1D-47C8-8F37-0DEF6FAFF73D}" type="datetimeFigureOut">
               <a:rPr lang="zh-TW" altLang="en-US" smtClean="0"/>
               <a:pPr/>
-              <a:t>2023/7/3</a:t>
+              <a:t>2024/5/18</a:t>
             </a:fld>
             <a:endParaRPr lang="zh-TW" altLang="en-US"/>
           </a:p>
@@ -745,10 +739,9 @@
           <a:lstStyle/>
           <a:p>
             <a:r>
-              <a:rPr lang="zh-TW" altLang="en-US" smtClean="0"/>
+              <a:rPr lang="zh-TW" altLang="en-US"/>
               <a:t>按一下以編輯母片標題樣式</a:t>
             </a:r>
-            <a:endParaRPr lang="zh-TW" altLang="en-US"/>
           </a:p>
         </p:txBody>
       </p:sp>
@@ -769,38 +762,37 @@
           <a:p>
             <a:pPr lvl="0"/>
             <a:r>
-              <a:rPr lang="zh-TW" altLang="en-US" smtClean="0"/>
+              <a:rPr lang="zh-TW" altLang="en-US"/>
               <a:t>按一下以編輯母片文字樣式</a:t>
             </a:r>
           </a:p>
           <a:p>
             <a:pPr lvl="1"/>
             <a:r>
-              <a:rPr lang="zh-TW" altLang="en-US" smtClean="0"/>
+              <a:rPr lang="zh-TW" altLang="en-US"/>
               <a:t>第二層</a:t>
             </a:r>
           </a:p>
           <a:p>
             <a:pPr lvl="2"/>
             <a:r>
-              <a:rPr lang="zh-TW" altLang="en-US" smtClean="0"/>
+              <a:rPr lang="zh-TW" altLang="en-US"/>
               <a:t>第三層</a:t>
             </a:r>
           </a:p>
           <a:p>
             <a:pPr lvl="3"/>
             <a:r>
-              <a:rPr lang="zh-TW" altLang="en-US" smtClean="0"/>
+              <a:rPr lang="zh-TW" altLang="en-US"/>
               <a:t>第四層</a:t>
             </a:r>
           </a:p>
           <a:p>
             <a:pPr lvl="4"/>
             <a:r>
-              <a:rPr lang="zh-TW" altLang="en-US" smtClean="0"/>
+              <a:rPr lang="zh-TW" altLang="en-US"/>
               <a:t>第五層</a:t>
             </a:r>
-            <a:endParaRPr lang="zh-TW" altLang="en-US"/>
           </a:p>
         </p:txBody>
       </p:sp>
@@ -822,7 +814,7 @@
             <a:fld id="{98A0A244-3D1D-47C8-8F37-0DEF6FAFF73D}" type="datetimeFigureOut">
               <a:rPr lang="zh-TW" altLang="en-US" smtClean="0"/>
               <a:pPr/>
-              <a:t>2023/7/3</a:t>
+              <a:t>2024/5/18</a:t>
             </a:fld>
             <a:endParaRPr lang="zh-TW" altLang="en-US"/>
           </a:p>
@@ -921,10 +913,9 @@
           </a:lstStyle>
           <a:p>
             <a:r>
-              <a:rPr lang="zh-TW" altLang="en-US" smtClean="0"/>
+              <a:rPr lang="zh-TW" altLang="en-US"/>
               <a:t>按一下以編輯母片標題樣式</a:t>
             </a:r>
-            <a:endParaRPr lang="zh-TW" altLang="en-US"/>
           </a:p>
         </p:txBody>
       </p:sp>
@@ -1041,7 +1032,7 @@
           <a:p>
             <a:pPr lvl="0"/>
             <a:r>
-              <a:rPr lang="zh-TW" altLang="en-US" smtClean="0"/>
+              <a:rPr lang="zh-TW" altLang="en-US"/>
               <a:t>按一下以編輯母片文字樣式</a:t>
             </a:r>
           </a:p>
@@ -1065,7 +1056,7 @@
             <a:fld id="{98A0A244-3D1D-47C8-8F37-0DEF6FAFF73D}" type="datetimeFigureOut">
               <a:rPr lang="zh-TW" altLang="en-US" smtClean="0"/>
               <a:pPr/>
-              <a:t>2023/7/3</a:t>
+              <a:t>2024/5/18</a:t>
             </a:fld>
             <a:endParaRPr lang="zh-TW" altLang="en-US"/>
           </a:p>
@@ -1155,10 +1146,9 @@
           <a:lstStyle/>
           <a:p>
             <a:r>
-              <a:rPr lang="zh-TW" altLang="en-US" smtClean="0"/>
+              <a:rPr lang="zh-TW" altLang="en-US"/>
               <a:t>按一下以編輯母片標題樣式</a:t>
             </a:r>
-            <a:endParaRPr lang="zh-TW" altLang="en-US"/>
           </a:p>
         </p:txBody>
       </p:sp>
@@ -1212,38 +1202,37 @@
           <a:p>
             <a:pPr lvl="0"/>
             <a:r>
-              <a:rPr lang="zh-TW" altLang="en-US" smtClean="0"/>
+              <a:rPr lang="zh-TW" altLang="en-US"/>
               <a:t>按一下以編輯母片文字樣式</a:t>
             </a:r>
           </a:p>
           <a:p>
             <a:pPr lvl="1"/>
             <a:r>
-              <a:rPr lang="zh-TW" altLang="en-US" smtClean="0"/>
+              <a:rPr lang="zh-TW" altLang="en-US"/>
               <a:t>第二層</a:t>
             </a:r>
           </a:p>
           <a:p>
             <a:pPr lvl="2"/>
             <a:r>
-              <a:rPr lang="zh-TW" altLang="en-US" smtClean="0"/>
+              <a:rPr lang="zh-TW" altLang="en-US"/>
               <a:t>第三層</a:t>
             </a:r>
           </a:p>
           <a:p>
             <a:pPr lvl="3"/>
             <a:r>
-              <a:rPr lang="zh-TW" altLang="en-US" smtClean="0"/>
+              <a:rPr lang="zh-TW" altLang="en-US"/>
               <a:t>第四層</a:t>
             </a:r>
           </a:p>
           <a:p>
             <a:pPr lvl="4"/>
             <a:r>
-              <a:rPr lang="zh-TW" altLang="en-US" smtClean="0"/>
+              <a:rPr lang="zh-TW" altLang="en-US"/>
               <a:t>第五層</a:t>
             </a:r>
-            <a:endParaRPr lang="zh-TW" altLang="en-US"/>
           </a:p>
         </p:txBody>
       </p:sp>
@@ -1297,38 +1286,37 @@
           <a:p>
             <a:pPr lvl="0"/>
             <a:r>
-              <a:rPr lang="zh-TW" altLang="en-US" smtClean="0"/>
+              <a:rPr lang="zh-TW" altLang="en-US"/>
               <a:t>按一下以編輯母片文字樣式</a:t>
             </a:r>
           </a:p>
           <a:p>
             <a:pPr lvl="1"/>
             <a:r>
-              <a:rPr lang="zh-TW" altLang="en-US" smtClean="0"/>
+              <a:rPr lang="zh-TW" altLang="en-US"/>
               <a:t>第二層</a:t>
             </a:r>
           </a:p>
           <a:p>
             <a:pPr lvl="2"/>
             <a:r>
-              <a:rPr lang="zh-TW" altLang="en-US" smtClean="0"/>
+              <a:rPr lang="zh-TW" altLang="en-US"/>
               <a:t>第三層</a:t>
             </a:r>
           </a:p>
           <a:p>
             <a:pPr lvl="3"/>
             <a:r>
-              <a:rPr lang="zh-TW" altLang="en-US" smtClean="0"/>
+              <a:rPr lang="zh-TW" altLang="en-US"/>
               <a:t>第四層</a:t>
             </a:r>
           </a:p>
           <a:p>
             <a:pPr lvl="4"/>
             <a:r>
-              <a:rPr lang="zh-TW" altLang="en-US" smtClean="0"/>
+              <a:rPr lang="zh-TW" altLang="en-US"/>
               <a:t>第五層</a:t>
             </a:r>
-            <a:endParaRPr lang="zh-TW" altLang="en-US"/>
           </a:p>
         </p:txBody>
       </p:sp>
@@ -1350,7 +1338,7 @@
             <a:fld id="{98A0A244-3D1D-47C8-8F37-0DEF6FAFF73D}" type="datetimeFigureOut">
               <a:rPr lang="zh-TW" altLang="en-US" smtClean="0"/>
               <a:pPr/>
-              <a:t>2023/7/3</a:t>
+              <a:t>2024/5/18</a:t>
             </a:fld>
             <a:endParaRPr lang="zh-TW" altLang="en-US"/>
           </a:p>
@@ -1444,10 +1432,9 @@
           </a:lstStyle>
           <a:p>
             <a:r>
-              <a:rPr lang="zh-TW" altLang="en-US" smtClean="0"/>
+              <a:rPr lang="zh-TW" altLang="en-US"/>
               <a:t>按一下以編輯母片標題樣式</a:t>
             </a:r>
-            <a:endParaRPr lang="zh-TW" altLang="en-US"/>
           </a:p>
         </p:txBody>
       </p:sp>
@@ -1510,7 +1497,7 @@
           <a:p>
             <a:pPr lvl="0"/>
             <a:r>
-              <a:rPr lang="zh-TW" altLang="en-US" smtClean="0"/>
+              <a:rPr lang="zh-TW" altLang="en-US"/>
               <a:t>按一下以編輯母片文字樣式</a:t>
             </a:r>
           </a:p>
@@ -1566,38 +1553,37 @@
           <a:p>
             <a:pPr lvl="0"/>
             <a:r>
-              <a:rPr lang="zh-TW" altLang="en-US" smtClean="0"/>
+              <a:rPr lang="zh-TW" altLang="en-US"/>
               <a:t>按一下以編輯母片文字樣式</a:t>
             </a:r>
           </a:p>
           <a:p>
             <a:pPr lvl="1"/>
             <a:r>
-              <a:rPr lang="zh-TW" altLang="en-US" smtClean="0"/>
+              <a:rPr lang="zh-TW" altLang="en-US"/>
               <a:t>第二層</a:t>
             </a:r>
           </a:p>
           <a:p>
             <a:pPr lvl="2"/>
             <a:r>
-              <a:rPr lang="zh-TW" altLang="en-US" smtClean="0"/>
+              <a:rPr lang="zh-TW" altLang="en-US"/>
               <a:t>第三層</a:t>
             </a:r>
           </a:p>
           <a:p>
             <a:pPr lvl="3"/>
             <a:r>
-              <a:rPr lang="zh-TW" altLang="en-US" smtClean="0"/>
+              <a:rPr lang="zh-TW" altLang="en-US"/>
               <a:t>第四層</a:t>
             </a:r>
           </a:p>
           <a:p>
             <a:pPr lvl="4"/>
             <a:r>
-              <a:rPr lang="zh-TW" altLang="en-US" smtClean="0"/>
+              <a:rPr lang="zh-TW" altLang="en-US"/>
               <a:t>第五層</a:t>
             </a:r>
-            <a:endParaRPr lang="zh-TW" altLang="en-US"/>
           </a:p>
         </p:txBody>
       </p:sp>
@@ -1660,7 +1646,7 @@
           <a:p>
             <a:pPr lvl="0"/>
             <a:r>
-              <a:rPr lang="zh-TW" altLang="en-US" smtClean="0"/>
+              <a:rPr lang="zh-TW" altLang="en-US"/>
               <a:t>按一下以編輯母片文字樣式</a:t>
             </a:r>
           </a:p>
@@ -1716,38 +1702,37 @@
           <a:p>
             <a:pPr lvl="0"/>
             <a:r>
-              <a:rPr lang="zh-TW" altLang="en-US" smtClean="0"/>
+              <a:rPr lang="zh-TW" altLang="en-US"/>
               <a:t>按一下以編輯母片文字樣式</a:t>
             </a:r>
           </a:p>
           <a:p>
             <a:pPr lvl="1"/>
             <a:r>
-              <a:rPr lang="zh-TW" altLang="en-US" smtClean="0"/>
+              <a:rPr lang="zh-TW" altLang="en-US"/>
               <a:t>第二層</a:t>
             </a:r>
           </a:p>
           <a:p>
             <a:pPr lvl="2"/>
             <a:r>
-              <a:rPr lang="zh-TW" altLang="en-US" smtClean="0"/>
+              <a:rPr lang="zh-TW" altLang="en-US"/>
               <a:t>第三層</a:t>
             </a:r>
           </a:p>
           <a:p>
             <a:pPr lvl="3"/>
             <a:r>
-              <a:rPr lang="zh-TW" altLang="en-US" smtClean="0"/>
+              <a:rPr lang="zh-TW" altLang="en-US"/>
               <a:t>第四層</a:t>
             </a:r>
           </a:p>
           <a:p>
             <a:pPr lvl="4"/>
             <a:r>
-              <a:rPr lang="zh-TW" altLang="en-US" smtClean="0"/>
+              <a:rPr lang="zh-TW" altLang="en-US"/>
               <a:t>第五層</a:t>
             </a:r>
-            <a:endParaRPr lang="zh-TW" altLang="en-US"/>
           </a:p>
         </p:txBody>
       </p:sp>
@@ -1769,7 +1754,7 @@
             <a:fld id="{98A0A244-3D1D-47C8-8F37-0DEF6FAFF73D}" type="datetimeFigureOut">
               <a:rPr lang="zh-TW" altLang="en-US" smtClean="0"/>
               <a:pPr/>
-              <a:t>2023/7/3</a:t>
+              <a:t>2024/5/18</a:t>
             </a:fld>
             <a:endParaRPr lang="zh-TW" altLang="en-US"/>
           </a:p>
@@ -1859,10 +1844,9 @@
           <a:lstStyle/>
           <a:p>
             <a:r>
-              <a:rPr lang="zh-TW" altLang="en-US" smtClean="0"/>
+              <a:rPr lang="zh-TW" altLang="en-US"/>
               <a:t>按一下以編輯母片標題樣式</a:t>
             </a:r>
-            <a:endParaRPr lang="zh-TW" altLang="en-US"/>
           </a:p>
         </p:txBody>
       </p:sp>
@@ -1884,7 +1868,7 @@
             <a:fld id="{98A0A244-3D1D-47C8-8F37-0DEF6FAFF73D}" type="datetimeFigureOut">
               <a:rPr lang="zh-TW" altLang="en-US" smtClean="0"/>
               <a:pPr/>
-              <a:t>2023/7/3</a:t>
+              <a:t>2024/5/18</a:t>
             </a:fld>
             <a:endParaRPr lang="zh-TW" altLang="en-US"/>
           </a:p>
@@ -1976,7 +1960,7 @@
             <a:fld id="{98A0A244-3D1D-47C8-8F37-0DEF6FAFF73D}" type="datetimeFigureOut">
               <a:rPr lang="zh-TW" altLang="en-US" smtClean="0"/>
               <a:pPr/>
-              <a:t>2023/7/3</a:t>
+              <a:t>2024/5/18</a:t>
             </a:fld>
             <a:endParaRPr lang="zh-TW" altLang="en-US"/>
           </a:p>
@@ -2075,10 +2059,9 @@
           </a:lstStyle>
           <a:p>
             <a:r>
-              <a:rPr lang="zh-TW" altLang="en-US" smtClean="0"/>
+              <a:rPr lang="zh-TW" altLang="en-US"/>
               <a:t>按一下以編輯母片標題樣式</a:t>
             </a:r>
-            <a:endParaRPr lang="zh-TW" altLang="en-US"/>
           </a:p>
         </p:txBody>
       </p:sp>
@@ -2132,38 +2115,37 @@
           <a:p>
             <a:pPr lvl="0"/>
             <a:r>
-              <a:rPr lang="zh-TW" altLang="en-US" smtClean="0"/>
+              <a:rPr lang="zh-TW" altLang="en-US"/>
               <a:t>按一下以編輯母片文字樣式</a:t>
             </a:r>
           </a:p>
           <a:p>
             <a:pPr lvl="1"/>
             <a:r>
-              <a:rPr lang="zh-TW" altLang="en-US" smtClean="0"/>
+              <a:rPr lang="zh-TW" altLang="en-US"/>
               <a:t>第二層</a:t>
             </a:r>
           </a:p>
           <a:p>
             <a:pPr lvl="2"/>
             <a:r>
-              <a:rPr lang="zh-TW" altLang="en-US" smtClean="0"/>
+              <a:rPr lang="zh-TW" altLang="en-US"/>
               <a:t>第三層</a:t>
             </a:r>
           </a:p>
           <a:p>
             <a:pPr lvl="3"/>
             <a:r>
-              <a:rPr lang="zh-TW" altLang="en-US" smtClean="0"/>
+              <a:rPr lang="zh-TW" altLang="en-US"/>
               <a:t>第四層</a:t>
             </a:r>
           </a:p>
           <a:p>
             <a:pPr lvl="4"/>
             <a:r>
-              <a:rPr lang="zh-TW" altLang="en-US" smtClean="0"/>
+              <a:rPr lang="zh-TW" altLang="en-US"/>
               <a:t>第五層</a:t>
             </a:r>
-            <a:endParaRPr lang="zh-TW" altLang="en-US"/>
           </a:p>
         </p:txBody>
       </p:sp>
@@ -2226,7 +2208,7 @@
           <a:p>
             <a:pPr lvl="0"/>
             <a:r>
-              <a:rPr lang="zh-TW" altLang="en-US" smtClean="0"/>
+              <a:rPr lang="zh-TW" altLang="en-US"/>
               <a:t>按一下以編輯母片文字樣式</a:t>
             </a:r>
           </a:p>
@@ -2250,7 +2232,7 @@
             <a:fld id="{98A0A244-3D1D-47C8-8F37-0DEF6FAFF73D}" type="datetimeFigureOut">
               <a:rPr lang="zh-TW" altLang="en-US" smtClean="0"/>
               <a:pPr/>
-              <a:t>2023/7/3</a:t>
+              <a:t>2024/5/18</a:t>
             </a:fld>
             <a:endParaRPr lang="zh-TW" altLang="en-US"/>
           </a:p>
@@ -2349,10 +2331,9 @@
           </a:lstStyle>
           <a:p>
             <a:r>
-              <a:rPr lang="zh-TW" altLang="en-US" smtClean="0"/>
+              <a:rPr lang="zh-TW" altLang="en-US"/>
               <a:t>按一下以編輯母片標題樣式</a:t>
             </a:r>
-            <a:endParaRPr lang="zh-TW" altLang="en-US"/>
           </a:p>
         </p:txBody>
       </p:sp>
@@ -2414,10 +2395,9 @@
           </a:lstStyle>
           <a:p>
             <a:r>
-              <a:rPr lang="zh-TW" altLang="en-US" smtClean="0"/>
+              <a:rPr lang="zh-TW" altLang="en-US"/>
               <a:t>按一下圖示以新增圖片</a:t>
             </a:r>
-            <a:endParaRPr lang="zh-TW" altLang="en-US"/>
           </a:p>
         </p:txBody>
       </p:sp>
@@ -2480,7 +2460,7 @@
           <a:p>
             <a:pPr lvl="0"/>
             <a:r>
-              <a:rPr lang="zh-TW" altLang="en-US" smtClean="0"/>
+              <a:rPr lang="zh-TW" altLang="en-US"/>
               <a:t>按一下以編輯母片文字樣式</a:t>
             </a:r>
           </a:p>
@@ -2504,7 +2484,7 @@
             <a:fld id="{98A0A244-3D1D-47C8-8F37-0DEF6FAFF73D}" type="datetimeFigureOut">
               <a:rPr lang="zh-TW" altLang="en-US" smtClean="0"/>
               <a:pPr/>
-              <a:t>2023/7/3</a:t>
+              <a:t>2024/5/18</a:t>
             </a:fld>
             <a:endParaRPr lang="zh-TW" altLang="en-US"/>
           </a:p>
@@ -2614,10 +2594,9 @@
           <a:lstStyle/>
           <a:p>
             <a:r>
-              <a:rPr lang="zh-TW" altLang="en-US" smtClean="0"/>
+              <a:rPr lang="zh-TW" altLang="en-US"/>
               <a:t>按一下以編輯母片標題樣式</a:t>
             </a:r>
-            <a:endParaRPr lang="zh-TW" altLang="en-US"/>
           </a:p>
         </p:txBody>
       </p:sp>
@@ -2648,38 +2627,37 @@
           <a:p>
             <a:pPr lvl="0"/>
             <a:r>
-              <a:rPr lang="zh-TW" altLang="en-US" smtClean="0"/>
+              <a:rPr lang="zh-TW" altLang="en-US"/>
               <a:t>按一下以編輯母片文字樣式</a:t>
             </a:r>
           </a:p>
           <a:p>
             <a:pPr lvl="1"/>
             <a:r>
-              <a:rPr lang="zh-TW" altLang="en-US" smtClean="0"/>
+              <a:rPr lang="zh-TW" altLang="en-US"/>
               <a:t>第二層</a:t>
             </a:r>
           </a:p>
           <a:p>
             <a:pPr lvl="2"/>
             <a:r>
-              <a:rPr lang="zh-TW" altLang="en-US" smtClean="0"/>
+              <a:rPr lang="zh-TW" altLang="en-US"/>
               <a:t>第三層</a:t>
             </a:r>
           </a:p>
           <a:p>
             <a:pPr lvl="3"/>
             <a:r>
-              <a:rPr lang="zh-TW" altLang="en-US" smtClean="0"/>
+              <a:rPr lang="zh-TW" altLang="en-US"/>
               <a:t>第四層</a:t>
             </a:r>
           </a:p>
           <a:p>
             <a:pPr lvl="4"/>
             <a:r>
-              <a:rPr lang="zh-TW" altLang="en-US" smtClean="0"/>
+              <a:rPr lang="zh-TW" altLang="en-US"/>
               <a:t>第五層</a:t>
             </a:r>
-            <a:endParaRPr lang="zh-TW" altLang="en-US"/>
           </a:p>
         </p:txBody>
       </p:sp>
@@ -2719,7 +2697,7 @@
             <a:fld id="{98A0A244-3D1D-47C8-8F37-0DEF6FAFF73D}" type="datetimeFigureOut">
               <a:rPr lang="zh-TW" altLang="en-US" smtClean="0"/>
               <a:pPr/>
-              <a:t>2023/7/3</a:t>
+              <a:t>2024/5/18</a:t>
             </a:fld>
             <a:endParaRPr lang="zh-TW" altLang="en-US"/>
           </a:p>
@@ -3113,7 +3091,7 @@
           <a:lstStyle/>
           <a:p>
             <a:r>
-              <a:rPr lang="zh-TW" altLang="en-US" sz="7200" b="1" i="1" dirty="0" smtClean="0">
+              <a:rPr lang="zh-TW" altLang="en-US" sz="7200" b="1" i="1" dirty="0">
                 <a:solidFill>
                   <a:srgbClr val="000066"/>
                 </a:solidFill>
@@ -3127,24 +3105,7 @@
                 <a:latin typeface="微軟正黑體" pitchFamily="34" charset="-120"/>
                 <a:ea typeface="微軟正黑體" pitchFamily="34" charset="-120"/>
               </a:rPr>
-              <a:t>十</a:t>
-            </a:r>
-            <a:r>
-              <a:rPr lang="zh-TW" altLang="en-US" sz="7200" b="1" i="1" dirty="0">
-                <a:solidFill>
-                  <a:srgbClr val="000066"/>
-                </a:solidFill>
-                <a:effectLst>
-                  <a:outerShdw blurRad="38100" dist="38100" dir="2700000" algn="tl">
-                    <a:srgbClr val="000000">
-                      <a:alpha val="43137"/>
-                    </a:srgbClr>
-                  </a:outerShdw>
-                </a:effectLst>
-                <a:latin typeface="微軟正黑體" pitchFamily="34" charset="-120"/>
-                <a:ea typeface="微軟正黑體" pitchFamily="34" charset="-120"/>
-              </a:rPr>
-              <a:t>架的冠冕</a:t>
+              <a:t>十架的冠冕</a:t>
             </a:r>
           </a:p>
         </p:txBody>
@@ -3212,37 +3173,7 @@
                 <a:latin typeface="微軟正黑體" pitchFamily="34" charset="-120"/>
                 <a:ea typeface="微軟正黑體" pitchFamily="34" charset="-120"/>
               </a:rPr>
-              <a:t>路是難</a:t>
-            </a:r>
-            <a:r>
-              <a:rPr lang="zh-TW" altLang="en-US" sz="6400" b="1" dirty="0" smtClean="0">
-                <a:solidFill>
-                  <a:srgbClr val="000066"/>
-                </a:solidFill>
-                <a:latin typeface="微軟正黑體" pitchFamily="34" charset="-120"/>
-                <a:ea typeface="微軟正黑體" pitchFamily="34" charset="-120"/>
-              </a:rPr>
-              <a:t>走  但</a:t>
-            </a:r>
-            <a:r>
-              <a:rPr lang="zh-TW" altLang="en-US" sz="6400" b="1" dirty="0">
-                <a:solidFill>
-                  <a:srgbClr val="000066"/>
-                </a:solidFill>
-                <a:latin typeface="微軟正黑體" pitchFamily="34" charset="-120"/>
-                <a:ea typeface="微軟正黑體" pitchFamily="34" charset="-120"/>
-              </a:rPr>
-              <a:t>比</a:t>
-            </a:r>
-            <a:r>
-              <a:rPr lang="zh-TW" altLang="en-US" sz="6400" b="1" dirty="0">
-                <a:solidFill>
-                  <a:srgbClr val="000066"/>
-                </a:solidFill>
-                <a:latin typeface="微軟正黑體" pitchFamily="34" charset="-120"/>
-                <a:ea typeface="微軟正黑體" pitchFamily="34" charset="-120"/>
-              </a:rPr>
-              <a:t>起</a:t>
+              <a:t>路是難走  但比起</a:t>
             </a:r>
             <a:r>
               <a:rPr lang="zh-CN" altLang="en-US" sz="6400" b="1" dirty="0">
@@ -3262,39 +3193,9 @@
                 <a:latin typeface="微軟正黑體" pitchFamily="34" charset="-120"/>
                 <a:ea typeface="微軟正黑體" pitchFamily="34" charset="-120"/>
               </a:rPr>
-              <a:t>的</a:t>
-            </a:r>
-            <a:r>
-              <a:rPr lang="zh-TW" altLang="en-US" sz="6400" b="1" dirty="0">
-                <a:solidFill>
-                  <a:srgbClr val="000066"/>
-                </a:solidFill>
-                <a:latin typeface="微軟正黑體" pitchFamily="34" charset="-120"/>
-                <a:ea typeface="微軟正黑體" pitchFamily="34" charset="-120"/>
-              </a:rPr>
-              <a:t>十</a:t>
-            </a:r>
-            <a:r>
-              <a:rPr lang="zh-TW" altLang="en-US" sz="6400" b="1" dirty="0">
-                <a:solidFill>
-                  <a:srgbClr val="000066"/>
-                </a:solidFill>
-                <a:latin typeface="微軟正黑體" pitchFamily="34" charset="-120"/>
-                <a:ea typeface="微軟正黑體" pitchFamily="34" charset="-120"/>
-              </a:rPr>
-              <a:t>架</a:t>
-            </a:r>
-            <a:r>
-              <a:rPr lang="zh-TW" altLang="en-US" sz="6400" b="1" dirty="0" smtClean="0">
-                <a:solidFill>
-                  <a:srgbClr val="000066"/>
-                </a:solidFill>
-                <a:latin typeface="微軟正黑體" pitchFamily="34" charset="-120"/>
-                <a:ea typeface="微軟正黑體" pitchFamily="34" charset="-120"/>
-              </a:rPr>
-              <a:t>路</a:t>
-            </a:r>
-            <a:endParaRPr lang="en-US" altLang="zh-TW" sz="6400" b="1" dirty="0" smtClean="0">
+              <a:t>的十架路</a:t>
+            </a:r>
+            <a:endParaRPr lang="en-US" altLang="zh-TW" sz="6400" b="1" dirty="0">
               <a:solidFill>
                 <a:srgbClr val="000066"/>
               </a:solidFill>
@@ -3314,20 +3215,10 @@
                 <a:latin typeface="微軟正黑體" pitchFamily="34" charset="-120"/>
                 <a:ea typeface="微軟正黑體" pitchFamily="34" charset="-120"/>
               </a:rPr>
-              <a:t>我今天算甚</a:t>
-            </a:r>
-            <a:r>
-              <a:rPr lang="zh-TW" altLang="en-US" sz="6400" b="1" dirty="0" smtClean="0">
-                <a:solidFill>
-                  <a:srgbClr val="000066"/>
-                </a:solidFill>
-                <a:latin typeface="微軟正黑體" pitchFamily="34" charset="-120"/>
-                <a:ea typeface="微軟正黑體" pitchFamily="34" charset="-120"/>
-              </a:rPr>
-              <a:t>麼</a:t>
-            </a:r>
-            <a:r>
-              <a:rPr lang="en-US" altLang="zh-TW" sz="6400" b="1" dirty="0" smtClean="0">
+              <a:t>我今天算甚麼</a:t>
+            </a:r>
+            <a:r>
+              <a:rPr lang="en-US" altLang="zh-TW" sz="6400" b="1" dirty="0">
                 <a:solidFill>
                   <a:srgbClr val="000066"/>
                 </a:solidFill>
@@ -3337,42 +3228,15 @@
               <a:t>  </a:t>
             </a:r>
             <a:r>
-              <a:rPr lang="zh-TW" altLang="en-US" sz="6400" b="1" dirty="0" smtClean="0">
+              <a:rPr lang="zh-TW" altLang="en-US" sz="6400" b="1" dirty="0">
                 <a:solidFill>
                   <a:srgbClr val="000066"/>
                 </a:solidFill>
                 <a:latin typeface="微軟正黑體" pitchFamily="34" charset="-120"/>
                 <a:ea typeface="微軟正黑體" pitchFamily="34" charset="-120"/>
               </a:rPr>
-              <a:t>來</a:t>
-            </a:r>
-            <a:r>
-              <a:rPr lang="zh-TW" altLang="en-US" sz="6400" b="1" dirty="0">
-                <a:solidFill>
-                  <a:srgbClr val="000066"/>
-                </a:solidFill>
-                <a:latin typeface="微軟正黑體" pitchFamily="34" charset="-120"/>
-                <a:ea typeface="微軟正黑體" pitchFamily="34" charset="-120"/>
-              </a:rPr>
-              <a:t>起身再走</a:t>
-            </a:r>
-            <a:r>
-              <a:rPr lang="zh-TW" altLang="en-US" sz="6400" b="1" dirty="0" smtClean="0">
-                <a:solidFill>
-                  <a:srgbClr val="000066"/>
-                </a:solidFill>
-                <a:latin typeface="微軟正黑體" pitchFamily="34" charset="-120"/>
-                <a:ea typeface="微軟正黑體" pitchFamily="34" charset="-120"/>
-              </a:rPr>
-              <a:t>過</a:t>
-            </a:r>
-            <a:endParaRPr lang="zh-TW" altLang="en-US" sz="6400" b="1" dirty="0">
-              <a:solidFill>
-                <a:srgbClr val="000066"/>
-              </a:solidFill>
-              <a:latin typeface="微軟正黑體" pitchFamily="34" charset="-120"/>
-              <a:ea typeface="微軟正黑體" pitchFamily="34" charset="-120"/>
-            </a:endParaRPr>
+              <a:t>來起身再走過</a:t>
+            </a:r>
           </a:p>
         </p:txBody>
       </p:sp>
@@ -3417,7 +3281,7 @@
                 <a:latin typeface="Microsoft JhengHei" panose="020B0604030504040204" pitchFamily="34" charset="-120"/>
                 <a:ea typeface="Microsoft JhengHei" panose="020B0604030504040204" pitchFamily="34" charset="-120"/>
               </a:rPr>
-              <a:t>正</a:t>
+              <a:t>正歌</a:t>
             </a:r>
             <a:r>
               <a:rPr lang="en-US" sz="3733" b="1" dirty="0">
@@ -3502,20 +3366,10 @@
                 <a:latin typeface="微軟正黑體" pitchFamily="34" charset="-120"/>
                 <a:ea typeface="微軟正黑體" pitchFamily="34" charset="-120"/>
               </a:rPr>
-              <a:t>遇著痛</a:t>
-            </a:r>
-            <a:r>
-              <a:rPr lang="zh-TW" altLang="en-US" sz="6400" b="1" dirty="0" smtClean="0">
-                <a:solidFill>
-                  <a:srgbClr val="000066"/>
-                </a:solidFill>
-                <a:latin typeface="微軟正黑體" pitchFamily="34" charset="-120"/>
-                <a:ea typeface="微軟正黑體" pitchFamily="34" charset="-120"/>
-              </a:rPr>
-              <a:t>苦  </a:t>
-            </a:r>
-            <a:r>
-              <a:rPr lang="zh-CN" altLang="en-US" sz="6400" b="1" dirty="0" smtClean="0">
+              <a:t>遇著痛苦  </a:t>
+            </a:r>
+            <a:r>
+              <a:rPr lang="zh-CN" altLang="en-US" sz="6400" b="1" dirty="0">
                 <a:solidFill>
                   <a:srgbClr val="000066"/>
                 </a:solidFill>
@@ -3525,24 +3379,14 @@
               <a:t>祢</a:t>
             </a:r>
             <a:r>
-              <a:rPr lang="zh-TW" altLang="en-US" sz="6400" b="1" dirty="0" smtClean="0">
+              <a:rPr lang="zh-TW" altLang="en-US" sz="6400" b="1" dirty="0">
                 <a:solidFill>
                   <a:srgbClr val="000066"/>
                 </a:solidFill>
                 <a:latin typeface="微軟正黑體" pitchFamily="34" charset="-120"/>
                 <a:ea typeface="微軟正黑體" pitchFamily="34" charset="-120"/>
               </a:rPr>
-              <a:t>亦</a:t>
-            </a:r>
-            <a:r>
-              <a:rPr lang="zh-TW" altLang="en-US" sz="6400" b="1" dirty="0">
-                <a:solidFill>
-                  <a:srgbClr val="000066"/>
-                </a:solidFill>
-                <a:latin typeface="微軟正黑體" pitchFamily="34" charset="-120"/>
-                <a:ea typeface="微軟正黑體" pitchFamily="34" charset="-120"/>
-              </a:rPr>
-              <a:t>經過世間苦與樂</a:t>
+              <a:t>亦經過世間苦與樂</a:t>
             </a:r>
             <a:endParaRPr lang="en-US" altLang="zh-TW" sz="6400" b="1" dirty="0">
               <a:solidFill>
@@ -3567,34 +3411,14 @@
               <a:t>祢</a:t>
             </a:r>
             <a:r>
-              <a:rPr lang="zh-TW" altLang="en-US" sz="6400" b="1" dirty="0" smtClean="0">
+              <a:rPr lang="zh-TW" altLang="en-US" sz="6400" b="1" dirty="0">
                 <a:solidFill>
                   <a:srgbClr val="000066"/>
                 </a:solidFill>
                 <a:latin typeface="微軟正黑體" pitchFamily="34" charset="-120"/>
                 <a:ea typeface="微軟正黑體" pitchFamily="34" charset="-120"/>
               </a:rPr>
-              <a:t>的</a:t>
-            </a:r>
-            <a:r>
-              <a:rPr lang="zh-TW" altLang="en-US" sz="6400" b="1" dirty="0">
-                <a:solidFill>
-                  <a:srgbClr val="000066"/>
-                </a:solidFill>
-                <a:latin typeface="微軟正黑體" pitchFamily="34" charset="-120"/>
-                <a:ea typeface="微軟正黑體" pitchFamily="34" charset="-120"/>
-              </a:rPr>
-              <a:t>救贖愛</a:t>
-            </a:r>
-            <a:r>
-              <a:rPr lang="zh-TW" altLang="en-US" sz="6400" b="1" dirty="0">
-                <a:solidFill>
-                  <a:srgbClr val="000066"/>
-                </a:solidFill>
-                <a:latin typeface="微軟正黑體" pitchFamily="34" charset="-120"/>
-                <a:ea typeface="微軟正黑體" pitchFamily="34" charset="-120"/>
-              </a:rPr>
-              <a:t>海</a:t>
+              <a:t>的救贖愛海</a:t>
             </a:r>
             <a:r>
               <a:rPr lang="en-US" altLang="zh-TW" sz="6400" b="1" dirty="0">
@@ -3614,17 +3438,7 @@
                 <a:latin typeface="微軟正黑體" pitchFamily="34" charset="-120"/>
                 <a:ea typeface="微軟正黑體" pitchFamily="34" charset="-120"/>
               </a:rPr>
-              <a:t>我</a:t>
-            </a:r>
-            <a:r>
-              <a:rPr lang="zh-TW" altLang="en-US" sz="6400" b="1" dirty="0">
-                <a:solidFill>
-                  <a:srgbClr val="000066"/>
-                </a:solidFill>
-                <a:latin typeface="微軟正黑體" pitchFamily="34" charset="-120"/>
-                <a:ea typeface="微軟正黑體" pitchFamily="34" charset="-120"/>
-              </a:rPr>
-              <a:t>得勝和釋放</a:t>
+              <a:t>我得勝和釋放</a:t>
             </a:r>
           </a:p>
         </p:txBody>
@@ -3670,7 +3484,7 @@
                 <a:latin typeface="Microsoft JhengHei" panose="020B0604030504040204" pitchFamily="34" charset="-120"/>
                 <a:ea typeface="Microsoft JhengHei" panose="020B0604030504040204" pitchFamily="34" charset="-120"/>
               </a:rPr>
-              <a:t>正</a:t>
+              <a:t>正歌</a:t>
             </a:r>
             <a:r>
               <a:rPr lang="en-US" sz="3733" b="1" dirty="0">
@@ -3777,17 +3591,7 @@
                 <a:latin typeface="微軟正黑體" pitchFamily="34" charset="-120"/>
                 <a:ea typeface="微軟正黑體" pitchFamily="34" charset="-120"/>
               </a:rPr>
-              <a:t>仰</a:t>
-            </a:r>
-            <a:r>
-              <a:rPr lang="zh-TW" altLang="en-US" sz="6600" b="1" dirty="0" smtClean="0">
-                <a:solidFill>
-                  <a:srgbClr val="000066"/>
-                </a:solidFill>
-                <a:latin typeface="微軟正黑體" pitchFamily="34" charset="-120"/>
-                <a:ea typeface="微軟正黑體" pitchFamily="34" charset="-120"/>
-              </a:rPr>
-              <a:t>望</a:t>
+              <a:t>仰望</a:t>
             </a:r>
             <a:r>
               <a:rPr lang="zh-CN" altLang="en-US" sz="6600" b="1" dirty="0">
@@ -3800,24 +3604,14 @@
               <a:t>祢</a:t>
             </a:r>
             <a:r>
-              <a:rPr lang="zh-TW" altLang="en-US" sz="6600" b="1" dirty="0" smtClean="0">
+              <a:rPr lang="zh-TW" altLang="en-US" sz="6600" b="1" dirty="0">
                 <a:solidFill>
                   <a:srgbClr val="000066"/>
                 </a:solidFill>
                 <a:latin typeface="微軟正黑體" pitchFamily="34" charset="-120"/>
                 <a:ea typeface="微軟正黑體" pitchFamily="34" charset="-120"/>
               </a:rPr>
-              <a:t>渡</a:t>
-            </a:r>
-            <a:r>
-              <a:rPr lang="zh-TW" altLang="en-US" sz="6600" b="1" dirty="0">
-                <a:solidFill>
-                  <a:srgbClr val="000066"/>
-                </a:solidFill>
-                <a:latin typeface="微軟正黑體" pitchFamily="34" charset="-120"/>
-                <a:ea typeface="微軟正黑體" pitchFamily="34" charset="-120"/>
-              </a:rPr>
-              <a:t>過每天</a:t>
+              <a:t>渡過每天</a:t>
             </a:r>
             <a:endParaRPr lang="en-US" altLang="zh-TW" sz="6600" b="1" dirty="0">
               <a:solidFill>
@@ -3863,34 +3657,24 @@
               <a:t>( </a:t>
             </a:r>
             <a:r>
-              <a:rPr lang="zh-CN" altLang="en-US" sz="3733" b="1" dirty="0" smtClean="0">
+              <a:rPr lang="zh-CN" altLang="en-US" sz="3733" b="1" dirty="0">
                 <a:solidFill>
                   <a:srgbClr val="000066"/>
                 </a:solidFill>
                 <a:latin typeface="Microsoft JhengHei" panose="020B0604030504040204" pitchFamily="34" charset="-120"/>
                 <a:ea typeface="Microsoft JhengHei" panose="020B0604030504040204" pitchFamily="34" charset="-120"/>
               </a:rPr>
-              <a:t>副</a:t>
-            </a:r>
-            <a:r>
-              <a:rPr lang="en-US" sz="3733" b="1" dirty="0" smtClean="0">
+              <a:t>副歌</a:t>
+            </a:r>
+            <a:r>
+              <a:rPr lang="en-US" sz="3733" b="1" dirty="0">
                 <a:solidFill>
                   <a:srgbClr val="000066"/>
                 </a:solidFill>
                 <a:latin typeface="Microsoft JhengHei" panose="020B0604030504040204" pitchFamily="34" charset="-120"/>
                 <a:ea typeface="Microsoft JhengHei" panose="020B0604030504040204" pitchFamily="34" charset="-120"/>
               </a:rPr>
-              <a:t> </a:t>
-            </a:r>
-            <a:r>
-              <a:rPr lang="en-US" sz="3733" b="1" dirty="0">
-                <a:solidFill>
-                  <a:srgbClr val="000066"/>
-                </a:solidFill>
-                <a:latin typeface="Microsoft JhengHei" panose="020B0604030504040204" pitchFamily="34" charset="-120"/>
-                <a:ea typeface="Microsoft JhengHei" panose="020B0604030504040204" pitchFamily="34" charset="-120"/>
-              </a:rPr>
-              <a:t>)</a:t>
+              <a:t> )</a:t>
             </a:r>
             <a:endParaRPr lang="vi-VN" sz="3733" b="1" dirty="0">
               <a:solidFill>
@@ -3968,24 +3752,14 @@
               <a:t>祢</a:t>
             </a:r>
             <a:r>
-              <a:rPr lang="zh-TW" altLang="en-US" sz="6600" b="1" dirty="0" smtClean="0">
+              <a:rPr lang="zh-TW" altLang="en-US" sz="6600" b="1" dirty="0">
                 <a:solidFill>
                   <a:srgbClr val="000066"/>
                 </a:solidFill>
                 <a:latin typeface="微軟正黑體" pitchFamily="34" charset="-120"/>
                 <a:ea typeface="微軟正黑體" pitchFamily="34" charset="-120"/>
               </a:rPr>
-              <a:t>體</a:t>
-            </a:r>
-            <a:r>
-              <a:rPr lang="zh-TW" altLang="en-US" sz="6600" b="1" dirty="0">
-                <a:solidFill>
-                  <a:srgbClr val="000066"/>
-                </a:solidFill>
-                <a:latin typeface="微軟正黑體" pitchFamily="34" charset="-120"/>
-                <a:ea typeface="微軟正黑體" pitchFamily="34" charset="-120"/>
-              </a:rPr>
-              <a:t>恤我的軟弱</a:t>
+              <a:t>體恤我的軟弱</a:t>
             </a:r>
           </a:p>
           <a:p>
@@ -4002,13 +3776,6 @@
               </a:rPr>
               <a:t>明白我親身處境</a:t>
             </a:r>
-            <a:endParaRPr lang="zh-TW" altLang="en-US" sz="6600" b="1" dirty="0">
-              <a:solidFill>
-                <a:srgbClr val="000066"/>
-              </a:solidFill>
-              <a:latin typeface="微軟正黑體" pitchFamily="34" charset="-120"/>
-              <a:ea typeface="微軟正黑體" pitchFamily="34" charset="-120"/>
-            </a:endParaRPr>
           </a:p>
         </p:txBody>
       </p:sp>
@@ -4046,34 +3813,24 @@
               <a:t>( </a:t>
             </a:r>
             <a:r>
-              <a:rPr lang="zh-CN" altLang="en-US" sz="3733" b="1" dirty="0" smtClean="0">
+              <a:rPr lang="zh-CN" altLang="en-US" sz="3733" b="1" dirty="0">
                 <a:solidFill>
                   <a:srgbClr val="000066"/>
                 </a:solidFill>
                 <a:latin typeface="Microsoft JhengHei" panose="020B0604030504040204" pitchFamily="34" charset="-120"/>
                 <a:ea typeface="Microsoft JhengHei" panose="020B0604030504040204" pitchFamily="34" charset="-120"/>
               </a:rPr>
-              <a:t>副</a:t>
-            </a:r>
-            <a:r>
-              <a:rPr lang="en-US" sz="3733" b="1" dirty="0" smtClean="0">
+              <a:t>副歌</a:t>
+            </a:r>
+            <a:r>
+              <a:rPr lang="en-US" sz="3733" b="1" dirty="0">
                 <a:solidFill>
                   <a:srgbClr val="000066"/>
                 </a:solidFill>
                 <a:latin typeface="Microsoft JhengHei" panose="020B0604030504040204" pitchFamily="34" charset="-120"/>
                 <a:ea typeface="Microsoft JhengHei" panose="020B0604030504040204" pitchFamily="34" charset="-120"/>
               </a:rPr>
-              <a:t> </a:t>
-            </a:r>
-            <a:r>
-              <a:rPr lang="en-US" sz="3733" b="1" dirty="0">
-                <a:solidFill>
-                  <a:srgbClr val="000066"/>
-                </a:solidFill>
-                <a:latin typeface="Microsoft JhengHei" panose="020B0604030504040204" pitchFamily="34" charset="-120"/>
-                <a:ea typeface="Microsoft JhengHei" panose="020B0604030504040204" pitchFamily="34" charset="-120"/>
-              </a:rPr>
-              <a:t>)</a:t>
+              <a:t> )</a:t>
             </a:r>
             <a:endParaRPr lang="vi-VN" sz="3733" b="1" dirty="0">
               <a:solidFill>
@@ -4166,24 +3923,14 @@
               <a:t>祢</a:t>
             </a:r>
             <a:r>
-              <a:rPr lang="zh-TW" altLang="en-US" sz="6600" b="1" dirty="0" smtClean="0">
+              <a:rPr lang="zh-TW" altLang="en-US" sz="6600" b="1" dirty="0">
                 <a:solidFill>
                   <a:srgbClr val="000066"/>
                 </a:solidFill>
                 <a:latin typeface="微軟正黑體" pitchFamily="34" charset="-120"/>
                 <a:ea typeface="微軟正黑體" pitchFamily="34" charset="-120"/>
               </a:rPr>
-              <a:t>亦</a:t>
-            </a:r>
-            <a:r>
-              <a:rPr lang="zh-TW" altLang="en-US" sz="6600" b="1" dirty="0">
-                <a:solidFill>
-                  <a:srgbClr val="000066"/>
-                </a:solidFill>
-                <a:latin typeface="微軟正黑體" pitchFamily="34" charset="-120"/>
-                <a:ea typeface="微軟正黑體" pitchFamily="34" charset="-120"/>
-              </a:rPr>
-              <a:t>會在我身邊</a:t>
+              <a:t>亦會在我身邊</a:t>
             </a:r>
             <a:endParaRPr lang="en-US" altLang="zh-TW" sz="6600" b="1" dirty="0">
               <a:solidFill>
@@ -4229,34 +3976,24 @@
               <a:t>( </a:t>
             </a:r>
             <a:r>
-              <a:rPr lang="zh-CN" altLang="en-US" sz="3733" b="1" dirty="0" smtClean="0">
+              <a:rPr lang="zh-CN" altLang="en-US" sz="3733" b="1" dirty="0">
                 <a:solidFill>
                   <a:srgbClr val="000066"/>
                 </a:solidFill>
                 <a:latin typeface="Microsoft JhengHei" panose="020B0604030504040204" pitchFamily="34" charset="-120"/>
                 <a:ea typeface="Microsoft JhengHei" panose="020B0604030504040204" pitchFamily="34" charset="-120"/>
               </a:rPr>
-              <a:t>副</a:t>
-            </a:r>
-            <a:r>
-              <a:rPr lang="en-US" sz="3733" b="1" dirty="0" smtClean="0">
+              <a:t>副歌</a:t>
+            </a:r>
+            <a:r>
+              <a:rPr lang="en-US" sz="3733" b="1" dirty="0">
                 <a:solidFill>
                   <a:srgbClr val="000066"/>
                 </a:solidFill>
                 <a:latin typeface="Microsoft JhengHei" panose="020B0604030504040204" pitchFamily="34" charset="-120"/>
                 <a:ea typeface="Microsoft JhengHei" panose="020B0604030504040204" pitchFamily="34" charset="-120"/>
               </a:rPr>
-              <a:t> </a:t>
-            </a:r>
-            <a:r>
-              <a:rPr lang="en-US" sz="3733" b="1" dirty="0">
-                <a:solidFill>
-                  <a:srgbClr val="000066"/>
-                </a:solidFill>
-                <a:latin typeface="Microsoft JhengHei" panose="020B0604030504040204" pitchFamily="34" charset="-120"/>
-                <a:ea typeface="Microsoft JhengHei" panose="020B0604030504040204" pitchFamily="34" charset="-120"/>
-              </a:rPr>
-              <a:t>)</a:t>
+              <a:t> )</a:t>
             </a:r>
             <a:endParaRPr lang="vi-VN" sz="3733" b="1" dirty="0">
               <a:solidFill>
@@ -4334,24 +4071,14 @@
               <a:t>祢</a:t>
             </a:r>
             <a:r>
-              <a:rPr lang="zh-TW" altLang="en-US" sz="6600" b="1" dirty="0" smtClean="0">
+              <a:rPr lang="zh-TW" altLang="en-US" sz="6600" b="1" dirty="0">
                 <a:solidFill>
                   <a:srgbClr val="000066"/>
                 </a:solidFill>
                 <a:latin typeface="微軟正黑體" pitchFamily="34" charset="-120"/>
                 <a:ea typeface="微軟正黑體" pitchFamily="34" charset="-120"/>
               </a:rPr>
-              <a:t>興</a:t>
-            </a:r>
-            <a:r>
-              <a:rPr lang="zh-TW" altLang="en-US" sz="6600" b="1" dirty="0">
-                <a:solidFill>
-                  <a:srgbClr val="000066"/>
-                </a:solidFill>
-                <a:latin typeface="微軟正黑體" pitchFamily="34" charset="-120"/>
-                <a:ea typeface="微軟正黑體" pitchFamily="34" charset="-120"/>
-              </a:rPr>
-              <a:t>起我的生命</a:t>
+              <a:t>興起我的生命</a:t>
             </a:r>
             <a:endParaRPr lang="en-US" altLang="zh-TW" sz="6600" b="1" dirty="0">
               <a:solidFill>
@@ -4375,13 +4102,6 @@
               </a:rPr>
               <a:t>我今得到信心面對挑戰</a:t>
             </a:r>
-            <a:endParaRPr lang="zh-TW" altLang="en-US" sz="6600" b="1" dirty="0">
-              <a:solidFill>
-                <a:srgbClr val="000066"/>
-              </a:solidFill>
-              <a:latin typeface="微軟正黑體" pitchFamily="34" charset="-120"/>
-              <a:ea typeface="微軟正黑體" pitchFamily="34" charset="-120"/>
-            </a:endParaRPr>
           </a:p>
         </p:txBody>
       </p:sp>
@@ -4419,34 +4139,24 @@
               <a:t>( </a:t>
             </a:r>
             <a:r>
-              <a:rPr lang="zh-CN" altLang="en-US" sz="3733" b="1" dirty="0" smtClean="0">
+              <a:rPr lang="zh-CN" altLang="en-US" sz="3733" b="1" dirty="0">
                 <a:solidFill>
                   <a:srgbClr val="000066"/>
                 </a:solidFill>
                 <a:latin typeface="Microsoft JhengHei" panose="020B0604030504040204" pitchFamily="34" charset="-120"/>
                 <a:ea typeface="Microsoft JhengHei" panose="020B0604030504040204" pitchFamily="34" charset="-120"/>
               </a:rPr>
-              <a:t>副</a:t>
-            </a:r>
-            <a:r>
-              <a:rPr lang="en-US" sz="3733" b="1" dirty="0" smtClean="0">
+              <a:t>副歌</a:t>
+            </a:r>
+            <a:r>
+              <a:rPr lang="en-US" sz="3733" b="1">
                 <a:solidFill>
                   <a:srgbClr val="000066"/>
                 </a:solidFill>
                 <a:latin typeface="Microsoft JhengHei" panose="020B0604030504040204" pitchFamily="34" charset="-120"/>
                 <a:ea typeface="Microsoft JhengHei" panose="020B0604030504040204" pitchFamily="34" charset="-120"/>
               </a:rPr>
-              <a:t> </a:t>
-            </a:r>
-            <a:r>
-              <a:rPr lang="en-US" sz="3733" b="1" dirty="0">
-                <a:solidFill>
-                  <a:srgbClr val="000066"/>
-                </a:solidFill>
-                <a:latin typeface="Microsoft JhengHei" panose="020B0604030504040204" pitchFamily="34" charset="-120"/>
-                <a:ea typeface="Microsoft JhengHei" panose="020B0604030504040204" pitchFamily="34" charset="-120"/>
-              </a:rPr>
-              <a:t>)</a:t>
+              <a:t> )</a:t>
             </a:r>
             <a:endParaRPr lang="vi-VN" sz="3733" b="1" dirty="0">
               <a:solidFill>
